--- a/DBTUNING/ch13_페이징SQL튜닝/ch13_교안.pptx
+++ b/DBTUNING/ch13_페이징SQL튜닝/ch13_교안.pptx
@@ -542,7 +542,7 @@
           <a:lstStyle/>
           <a:p>
             <a:r>
-              <a:t>제11장은 리스트·게시판 화면에서 가장 흔하게 신고되는 성능 민원, 곧 "1페이지는 빠른데 뒷페이지로 갈수록 느려진다"는 현상을 정면으로 다루는 장이다. 이 장의 실행계획과 소요 시간은 모두 진료비청구심사 실습 DB에서 직접 캡처한 실측값이며, 실습용 인덱스를 만들었다가 종료 시 원상복구한 상태에서 관찰했다. 학습자가 이 장을 마치면 페이징 방식의 선택을 화면 요구사항과 비용 구조를 함께 놓고 설명할 수 있어야 한다. 페이징은 거의 모든 업무 화면에 들어가는 기능이라 이 장의 내용은 특정 프로젝트에 한정되지 않고 오래 재사용된다는 점도 함께 일러 둔다. 첫 시간에는 결론을 미리 말하지 말고 현상만 제시하는 편이 몰입에 유리하다.</a:t>
+              <a:t>제ch13은 리스트·게시판 화면에서 가장 흔하게 신고되는 성능 민원, 곧 "1페이지는 빠른데 뒷페이지로 갈수록 느려진다"는 현상을 정면으로 다루는 장이다. 이 장의 실행계획과 소요 시간은 모두 진료비청구심사 실습 DB에서 직접 캡처한 실측값이며, 실습용 인덱스를 만들었다가 종료 시 원상복구한 상태에서 관찰했다. 학습자가 이 장을 마치면 페이징 방식의 선택을 화면 요구사항과 비용 구조를 함께 놓고 설명할 수 있어야 한다. 페이징은 거의 모든 업무 화면에 들어가는 기능이라 이 장의 내용은 특정 프로젝트에 한정되지 않고 오래 재사용된다는 점도 함께 일러 둔다. 첫 시간에는 결론을 미리 말하지 말고 현상만 제시하는 편이 몰입에 유리하다.</a:t>
             </a:r>
           </a:p>
         </p:txBody>
@@ -822,7 +822,7 @@
           <a:lstStyle/>
           <a:p>
             <a:r>
-              <a:t>세 번째 절은 이 장의 이론 핵심이다. 여기서 원리를 잡아 두지 않으면 11.5의 실측표가 그냥 숫자 나열로 보인다. 설명 순서는 "무엇이 필요한가 → 그래서 무엇을 해야 하는가 → 그 작업이 어느 컬럼에 나타나는가" 세 단계로 잡는다. 특히 마지막 단계, 곧 비용이 나타나는 컬럼과 나타나지 않는 컬럼을 구분하는 부분이 Chapter 9와 이어지는 대목이다. 이 절은 코드도 실측표도 없는 순수 설명 구간이라 집중이 흐트러지기 쉬우므로, 질문을 자주 던져 학습자가 답을 만들어 보게 하는 진행이 효과적이다.</a:t>
+              <a:t>세 번째 절은 이 장의 이론 핵심이다. 여기서 원리를 잡아 두지 않으면 11.5의 실측표가 그냥 숫자 나열로 보인다. 설명 순서는 "무엇이 필요한가 → 그래서 무엇을 해야 하는가 → 그 작업이 어느 컬럼에 나타나는가" 세 단계로 잡는다. 특히 마지막 단계, 곧 비용이 나타나는 컬럼과 나타나지 않는 컬럼을 구분하는 부분이 ch11와 이어지는 대목이다. 이 절은 코드도 실측표도 없는 순수 설명 구간이라 집중이 흐트러지기 쉬우므로, 질문을 자주 던져 학습자가 답을 만들어 보게 하는 진행이 효과적이다.</a:t>
             </a:r>
           </a:p>
         </p:txBody>
@@ -962,7 +962,7 @@
           <a:lstStyle/>
           <a:p>
             <a:r>
-              <a:t>Chapter 9와의 연결은 이 장에서 반드시 짚어야 한다. 같은 함정이 다른 옷을 입고 두 번 나온 것이기 때문이다. 두 사례의 공통 성질은 정렬 계열 연산이라는 점이고, 정렬은 이미 가져온 데이터를 재배열하는 작업이라 블록을 더 만지지 않는다. 실습문제 10번이 두 챕터를 묶어 종합하라는 문항이므로, 여기서 나온 표현을 메모해 두라고 안내하면 좋다. 여기서 실행계획의 어느 컬럼이 어떤 자원을 보는지 한 번 더 정리해 준다. Buffers는 I/O, A-Time은 시간, OMem 계열은 메모리를 본다는 대응만 잡혀도 이후 판단이 크게 달라진다.</a:t>
+              <a:t>ch11와의 연결은 이 장에서 반드시 짚어야 한다. 같은 함정이 다른 옷을 입고 두 번 나온 것이기 때문이다. 두 사례의 공통 성질은 정렬 계열 연산이라는 점이고, 정렬은 이미 가져온 데이터를 재배열하는 작업이라 블록을 더 만지지 않는다. 실습문제 10번이 두 챕터를 묶어 종합하라는 문항이므로, 여기서 나온 표현을 메모해 두라고 안내하면 좋다. 여기서 실행계획의 어느 컬럼이 어떤 자원을 보는지 한 번 더 정리해 준다. Buffers는 I/O, A-Time은 시간, OMem 계열은 메모리를 본다는 대응만 잡혀도 이후 판단이 크게 달라진다.</a:t>
             </a:r>
           </a:p>
         </p:txBody>
@@ -2992,7 +2992,7 @@
           <a:lstStyle/>
           <a:p>
             <a:r>
-              <a:t>이번 장의 실습은 전부 서술형이며 SQL을 새로 작성하는 문항은 없다. 채점 기준은 결론의 일치가 아니라 근거로 삼은 값과 논리의 순서다. 3번과 10번은 Chapter 9를 다시 펴 봐야 하는 문항이므로 미리 안내한다. 7번은 정답이 열려 있으니 자기 서비스 경험을 끌어와 쓰도록 권한다. 마지막으로 실습 인덱스 정리를 다시 한번 강조하고 마친다. 답안을 쓸 때 실행계획 오퍼레이션 이름을 정확히 적었는지도 함께 본다. 이름을 흐릿하게 쓰면 근거가 흐릿해지고, 이후 챕터의 논의를 이어 가기도 어려워진다.</a:t>
+              <a:t>이번 장의 실습은 전부 서술형이며 SQL을 새로 작성하는 문항은 없다. 채점 기준은 결론의 일치가 아니라 근거로 삼은 값과 논리의 순서다. 3번과 10번은 ch11를 다시 펴 봐야 하는 문항이므로 미리 안내한다. 7번은 정답이 열려 있으니 자기 서비스 경험을 끌어와 쓰도록 권한다. 마지막으로 실습 인덱스 정리를 다시 한번 강조하고 마친다. 답안을 쓸 때 실행계획 오퍼레이션 이름을 정확히 적었는지도 함께 본다. 이름을 흐릿하게 쓰면 근거가 흐릿해지고, 이후 챕터의 논의를 이어 가기도 어려워진다.</a:t>
             </a:r>
           </a:p>
         </p:txBody>
@@ -6429,7 +6429,7 @@
                 </a:solidFill>
                 <a:latin typeface="Malgun Gothic"/>
               </a:rPr>
-              <a:t>Oracle SQL 튜닝 과정  ·  제11장</a:t>
+              <a:t>Oracle SQL 튜닝 과정  ·  제ch13</a:t>
             </a:r>
           </a:p>
         </p:txBody>
@@ -7821,7 +7821,7 @@
                 </a:solidFill>
                 <a:latin typeface="Malgun Gothic"/>
               </a:rPr>
-              <a:t>•  Chapter 9에서 확인한 함정이 여기서 그대로 재현된다</a:t>
+              <a:t>•  ch11에서 확인한 함정이 여기서 그대로 재현된다</a:t>
             </a:r>
           </a:p>
           <a:p>
@@ -7832,7 +7832,7 @@
                 </a:solidFill>
                 <a:latin typeface="Malgun Gothic"/>
               </a:rPr>
-              <a:t>    –  Chapter 9는 UNION의 SORT UNIQUE, 이 장은 순위 매김 정렬</a:t>
+              <a:t>    –  ch11는 UNION의 SORT UNIQUE, 이 장은 순위 매김 정렬</a:t>
             </a:r>
           </a:p>
           <a:p>
@@ -8317,7 +8317,7 @@
                 </a:solidFill>
                 <a:latin typeface="Malgun Gothic"/>
               </a:rPr>
-              <a:t>•  Chapter 3의 Q4, Chapter 10의 좁은 범위 사례와 같은 원리다</a:t>
+              <a:t>•  ch03의 Q4, ch12의 좁은 범위 사례와 같은 원리다</a:t>
             </a:r>
           </a:p>
         </p:txBody>
@@ -11878,7 +11878,7 @@
                 </a:solidFill>
                 <a:latin typeface="Malgun Gothic"/>
               </a:rPr>
-              <a:t>•  Chapter 9의 교훈이 그대로 재현된 사례다</a:t>
+              <a:t>•  ch11의 교훈이 그대로 재현된 사례다</a:t>
             </a:r>
           </a:p>
         </p:txBody>
@@ -15168,7 +15168,7 @@
                 </a:solidFill>
                 <a:latin typeface="Malgun Gothic"/>
               </a:rPr>
-              <a:t>•  실습문제 10문항 — SQL튜닝_Ch11_문제.md</a:t>
+              <a:t>•  실습문제 10문항 — ch13_문제.md</a:t>
             </a:r>
           </a:p>
           <a:p>
@@ -15278,7 +15278,7 @@
                 </a:solidFill>
                 <a:latin typeface="Malgun Gothic"/>
               </a:rPr>
-              <a:t>    –  10번  Chapter 9와 묶어 Buffers 단독 판단의 위험을 종합</a:t>
+              <a:t>    –  10번  ch11와 묶어 Buffers 단독 판단의 위험을 종합</a:t>
             </a:r>
           </a:p>
           <a:p>

--- a/DBTUNING/ch13_페이징SQL튜닝/ch13_교안.pptx
+++ b/DBTUNING/ch13_페이징SQL튜닝/ch13_교안.pptx
@@ -542,7 +542,7 @@
           <a:lstStyle/>
           <a:p>
             <a:r>
-              <a:t>제ch13은 리스트·게시판 화면에서 가장 흔하게 신고되는 성능 민원, 곧 "1페이지는 빠른데 뒷페이지로 갈수록 느려진다"는 현상을 정면으로 다루는 장이다. 이 장의 실행계획과 소요 시간은 모두 진료비청구심사 실습 DB에서 직접 캡처한 실측값이며, 실습용 인덱스를 만들었다가 종료 시 원상복구한 상태에서 관찰했다. 학습자가 이 장을 마치면 페이징 방식의 선택을 화면 요구사항과 비용 구조를 함께 놓고 설명할 수 있어야 한다. 페이징은 거의 모든 업무 화면에 들어가는 기능이라 이 장의 내용은 특정 프로젝트에 한정되지 않고 오래 재사용된다는 점도 함께 일러 둔다. 첫 시간에는 결론을 미리 말하지 말고 현상만 제시하는 편이 몰입에 유리하다.</a:t>
+              <a:t>ch13은 리스트·게시판 화면에서 가장 흔하게 신고되는 성능 민원, 곧 "1페이지는 빠른데 뒷페이지로 갈수록 느려진다"는 현상을 정면으로 다루는 장이다. 이 장의 실행계획과 소요 시간은 모두 진료비청구심사 실습 DB에서 직접 캡처한 실측값이며, 실습용 인덱스를 만들었다가 종료 시 원상복구한 상태에서 관찰했다. 학습자가 이 장을 마치면 페이징 방식의 선택을 화면 요구사항과 비용 구조를 함께 놓고 설명할 수 있어야 한다. 페이징은 거의 모든 업무 화면에 들어가는 기능이라 이 장의 내용은 특정 프로젝트에 한정되지 않고 오래 재사용된다는 점도 함께 일러 둔다. 첫 시간에는 결론을 미리 말하지 말고 현상만 제시하는 편이 몰입에 유리하다.</a:t>
             </a:r>
           </a:p>
         </p:txBody>
@@ -6429,7 +6429,7 @@
                 </a:solidFill>
                 <a:latin typeface="Malgun Gothic"/>
               </a:rPr>
-              <a:t>Oracle SQL 튜닝 과정  ·  제ch13</a:t>
+              <a:t>Oracle SQL 튜닝 과정  ·  ch13</a:t>
             </a:r>
           </a:p>
         </p:txBody>
